--- a/10-26 Cloud Native AI Summit APAC/AI Native Platform Engineering - Agents as the Primary Consumer.pptx
+++ b/10-26 Cloud Native AI Summit APAC/AI Native Platform Engineering - Agents as the Primary Consumer.pptx
@@ -816,91 +816,7 @@
               </a:spcAft>
               <a:buNone/>
             </a:pPr>
-            <a:r>
-              <a:rPr lang="en-US"/>
-              <a:t>Three things today: </a:t>
-            </a:r>
-            <a:endParaRPr/>
-          </a:p>
-          <a:p>
-            <a:pPr marL="457200" lvl="0" indent="-298450" algn="l" rtl="0">
-              <a:spcBef>
-                <a:spcPts val="0"/>
-              </a:spcBef>
-              <a:spcAft>
-                <a:spcPts val="0"/>
-              </a:spcAft>
-              <a:buSzPts val="1100"/>
-              <a:buChar char="●"/>
-            </a:pPr>
-            <a:r>
-              <a:rPr lang="en-US"/>
-              <a:t>StackQL in five minutes</a:t>
-            </a:r>
-            <a:endParaRPr/>
-          </a:p>
-          <a:p>
-            <a:pPr marL="457200" lvl="0" indent="-298450" algn="l" rtl="0">
-              <a:spcBef>
-                <a:spcPts val="0"/>
-              </a:spcBef>
-              <a:spcAft>
-                <a:spcPts val="0"/>
-              </a:spcAft>
-              <a:buSzPts val="1100"/>
-              <a:buChar char="●"/>
-            </a:pPr>
-            <a:r>
-              <a:rPr lang="en-US"/>
-              <a:t>what changes when agents write to your estate</a:t>
-            </a:r>
-            <a:endParaRPr/>
-          </a:p>
-          <a:p>
-            <a:pPr marL="457200" lvl="0" indent="-298450" algn="l" rtl="0">
-              <a:spcBef>
-                <a:spcPts val="0"/>
-              </a:spcBef>
-              <a:spcAft>
-                <a:spcPts val="0"/>
-              </a:spcAft>
-              <a:buSzPts val="1100"/>
-              <a:buChar char="●"/>
-            </a:pPr>
-            <a:r>
-              <a:rPr lang="en-US"/>
-              <a:t>and how to embed the MCP server in a Golang binary</a:t>
-            </a:r>
-            <a:endParaRPr/>
-          </a:p>
-          <a:p>
-            <a:pPr marL="0" lvl="0" indent="0" algn="l" rtl="0">
-              <a:spcBef>
-                <a:spcPts val="0"/>
-              </a:spcBef>
-              <a:spcAft>
-                <a:spcPts val="0"/>
-              </a:spcAft>
-              <a:buClr>
-                <a:schemeClr val="dk1"/>
-              </a:buClr>
-              <a:buSzPts val="1100"/>
-              <a:buFont typeface="Arial"/>
-              <a:buNone/>
-            </a:pPr>
-            <a:endParaRPr/>
-          </a:p>
-          <a:p>
-            <a:pPr marL="0" lvl="0" indent="0" algn="l" rtl="0">
-              <a:spcBef>
-                <a:spcPts val="0"/>
-              </a:spcBef>
-              <a:spcAft>
-                <a:spcPts val="0"/>
-              </a:spcAft>
-              <a:buNone/>
-            </a:pPr>
-            <a:endParaRPr/>
+            <a:endParaRPr dirty="0"/>
           </a:p>
         </p:txBody>
       </p:sp>
@@ -1023,90 +939,9 @@
               <a:buNone/>
             </a:pPr>
             <a:r>
-              <a:rPr lang="en-US"/>
-              <a:t>Three things today: </a:t>
-            </a:r>
-            <a:endParaRPr/>
-          </a:p>
-          <a:p>
-            <a:pPr marL="457200" lvl="0" indent="-298450" algn="l" rtl="0">
-              <a:spcBef>
-                <a:spcPts val="0"/>
-              </a:spcBef>
-              <a:spcAft>
-                <a:spcPts val="0"/>
-              </a:spcAft>
-              <a:buSzPts val="1100"/>
-              <a:buChar char="●"/>
-            </a:pPr>
-            <a:r>
-              <a:rPr lang="en-US"/>
-              <a:t>StackQL in five minutes</a:t>
-            </a:r>
-            <a:endParaRPr/>
-          </a:p>
-          <a:p>
-            <a:pPr marL="457200" lvl="0" indent="-298450" algn="l" rtl="0">
-              <a:spcBef>
-                <a:spcPts val="0"/>
-              </a:spcBef>
-              <a:spcAft>
-                <a:spcPts val="0"/>
-              </a:spcAft>
-              <a:buSzPts val="1100"/>
-              <a:buChar char="●"/>
-            </a:pPr>
-            <a:r>
-              <a:rPr lang="en-US"/>
-              <a:t>what changes when agents write to your estate</a:t>
-            </a:r>
-            <a:endParaRPr/>
-          </a:p>
-          <a:p>
-            <a:pPr marL="457200" lvl="0" indent="-298450" algn="l" rtl="0">
-              <a:spcBef>
-                <a:spcPts val="0"/>
-              </a:spcBef>
-              <a:spcAft>
-                <a:spcPts val="0"/>
-              </a:spcAft>
-              <a:buSzPts val="1100"/>
-              <a:buChar char="●"/>
-            </a:pPr>
-            <a:r>
-              <a:rPr lang="en-US"/>
-              <a:t>and how to embed the MCP server in a Golang binary</a:t>
-            </a:r>
-            <a:endParaRPr/>
-          </a:p>
-          <a:p>
-            <a:pPr marL="0" lvl="0" indent="0" algn="l" rtl="0">
-              <a:spcBef>
-                <a:spcPts val="0"/>
-              </a:spcBef>
-              <a:spcAft>
-                <a:spcPts val="0"/>
-              </a:spcAft>
-              <a:buClr>
-                <a:schemeClr val="dk1"/>
-              </a:buClr>
-              <a:buSzPts val="1100"/>
-              <a:buFont typeface="Arial"/>
-              <a:buNone/>
-            </a:pPr>
-            <a:endParaRPr/>
-          </a:p>
-          <a:p>
-            <a:pPr marL="0" lvl="0" indent="0" algn="l" rtl="0">
-              <a:spcBef>
-                <a:spcPts val="0"/>
-              </a:spcBef>
-              <a:spcAft>
-                <a:spcPts val="0"/>
-              </a:spcAft>
-              <a:buNone/>
-            </a:pPr>
-            <a:endParaRPr/>
+              <a:rPr lang="en-US" dirty="0"/>
+              <a:t>So the 2015 model breaks in 2026. The question is what replaces it.</a:t>
+            </a:r>
           </a:p>
         </p:txBody>
       </p:sp>
@@ -1283,10 +1118,14 @@
               <a:buNone/>
             </a:pPr>
             <a:r>
-              <a:rPr lang="en-US"/>
-              <a:t>Infrastructure-as-Code:intent lived in the code. </a:t>
-            </a:r>
-            <a:endParaRPr/>
+              <a:rPr lang="en-US" dirty="0" err="1"/>
+              <a:t>Infrastructure-as-Code:intent</a:t>
+            </a:r>
+            <a:r>
+              <a:rPr lang="en-US" dirty="0"/>
+              <a:t> lived in the code. </a:t>
+            </a:r>
+            <a:endParaRPr dirty="0"/>
           </a:p>
           <a:p>
             <a:pPr marL="0" lvl="0" indent="0" algn="l" rtl="0">
@@ -1298,7 +1137,7 @@
               </a:spcAft>
               <a:buNone/>
             </a:pPr>
-            <a:endParaRPr/>
+            <a:endParaRPr dirty="0"/>
           </a:p>
           <a:p>
             <a:pPr marL="0" lvl="0" indent="0" algn="l" rtl="0">
@@ -1311,10 +1150,10 @@
               <a:buNone/>
             </a:pPr>
             <a:r>
-              <a:rPr lang="en-US"/>
+              <a:rPr lang="en-US" dirty="0"/>
               <a:t>Infrastructure-as-Context: agents query it, the reality is data. </a:t>
             </a:r>
-            <a:endParaRPr/>
+            <a:endParaRPr dirty="0"/>
           </a:p>
           <a:p>
             <a:pPr marL="0" lvl="0" indent="0" algn="l" rtl="0">
@@ -1326,7 +1165,7 @@
               </a:spcAft>
               <a:buNone/>
             </a:pPr>
-            <a:endParaRPr/>
+            <a:endParaRPr dirty="0"/>
           </a:p>
           <a:p>
             <a:pPr marL="0" lvl="0" indent="0" algn="l" rtl="0">
@@ -1339,10 +1178,18 @@
               <a:buNone/>
             </a:pPr>
             <a:r>
-              <a:rPr lang="en-US"/>
-              <a:t>The deliverable changes from a file you wrote to a queryable view agents reason about. Code does not disappear. It just stops being the contract.</a:t>
-            </a:r>
-            <a:endParaRPr/>
+              <a:rPr lang="en-US" dirty="0"/>
+              <a:t>The deliverable changes from a file you wrote to a </a:t>
+            </a:r>
+            <a:r>
+              <a:rPr lang="en-US" dirty="0" err="1"/>
+              <a:t>queryable</a:t>
+            </a:r>
+            <a:r>
+              <a:rPr lang="en-US" dirty="0"/>
+              <a:t> view agents reason about. Code does not disappear. It just stops being the contract.</a:t>
+            </a:r>
+            <a:endParaRPr dirty="0"/>
           </a:p>
         </p:txBody>
       </p:sp>
@@ -1506,61 +1353,9 @@
               <a:buNone/>
             </a:pPr>
             <a:r>
-              <a:rPr lang="en-US"/>
-              <a:t>Three things today: </a:t>
-            </a:r>
-            <a:endParaRPr/>
-          </a:p>
-          <a:p>
-            <a:pPr marL="457200" lvl="0" indent="-298450" algn="l" rtl="0">
-              <a:spcBef>
-                <a:spcPts val="0"/>
-              </a:spcBef>
-              <a:spcAft>
-                <a:spcPts val="0"/>
-              </a:spcAft>
-              <a:buSzPts val="1100"/>
-              <a:buChar char="●"/>
-            </a:pPr>
-            <a:r>
-              <a:rPr lang="en-US"/>
-              <a:t>StackQL in five minutes</a:t>
-            </a:r>
-            <a:endParaRPr/>
-          </a:p>
-          <a:p>
-            <a:pPr marL="457200" lvl="0" indent="-298450" algn="l" rtl="0">
-              <a:spcBef>
-                <a:spcPts val="0"/>
-              </a:spcBef>
-              <a:spcAft>
-                <a:spcPts val="0"/>
-              </a:spcAft>
-              <a:buSzPts val="1100"/>
-              <a:buChar char="●"/>
-            </a:pPr>
-            <a:r>
-              <a:rPr lang="en-US"/>
-              <a:t>what changes when agents write to your estate</a:t>
-            </a:r>
-            <a:endParaRPr/>
-          </a:p>
-          <a:p>
-            <a:pPr marL="457200" lvl="0" indent="-298450" algn="l" rtl="0">
-              <a:spcBef>
-                <a:spcPts val="0"/>
-              </a:spcBef>
-              <a:spcAft>
-                <a:spcPts val="0"/>
-              </a:spcAft>
-              <a:buSzPts val="1100"/>
-              <a:buChar char="●"/>
-            </a:pPr>
-            <a:r>
-              <a:rPr lang="en-US"/>
-              <a:t>and how to embed the MCP server in a Golang binary</a:t>
-            </a:r>
-            <a:endParaRPr/>
+              <a:rPr lang="en-US" dirty="0"/>
+              <a:t>Several patterns are holding up in the agent era. </a:t>
+            </a:r>
           </a:p>
           <a:p>
             <a:pPr marL="0" lvl="0" indent="0" algn="l" rtl="0">
@@ -1570,14 +1365,9 @@
               <a:spcAft>
                 <a:spcPts val="0"/>
               </a:spcAft>
-              <a:buClr>
-                <a:schemeClr val="dk1"/>
-              </a:buClr>
-              <a:buSzPts val="1100"/>
-              <a:buFont typeface="Arial"/>
-              <a:buNone/>
-            </a:pPr>
-            <a:endParaRPr/>
+              <a:buNone/>
+            </a:pPr>
+            <a:endParaRPr lang="en-US" dirty="0"/>
           </a:p>
           <a:p>
             <a:pPr marL="0" lvl="0" indent="0" algn="l" rtl="0">
@@ -1589,7 +1379,61 @@
               </a:spcAft>
               <a:buNone/>
             </a:pPr>
-            <a:endParaRPr/>
+            <a:r>
+              <a:rPr lang="en-US" dirty="0"/>
+              <a:t>None of these are new ideas in isolation. </a:t>
+            </a:r>
+          </a:p>
+          <a:p>
+            <a:pPr marL="0" lvl="0" indent="0" algn="l" rtl="0">
+              <a:spcBef>
+                <a:spcPts val="0"/>
+              </a:spcBef>
+              <a:spcAft>
+                <a:spcPts val="0"/>
+              </a:spcAft>
+              <a:buNone/>
+            </a:pPr>
+            <a:endParaRPr lang="en-US" dirty="0"/>
+          </a:p>
+          <a:p>
+            <a:pPr marL="0" lvl="0" indent="0" algn="l" rtl="0">
+              <a:spcBef>
+                <a:spcPts val="0"/>
+              </a:spcBef>
+              <a:spcAft>
+                <a:spcPts val="0"/>
+              </a:spcAft>
+              <a:buNone/>
+            </a:pPr>
+            <a:r>
+              <a:rPr lang="en-US" dirty="0"/>
+              <a:t>Applied together, they become the contract. </a:t>
+            </a:r>
+          </a:p>
+          <a:p>
+            <a:pPr marL="0" lvl="0" indent="0" algn="l" rtl="0">
+              <a:spcBef>
+                <a:spcPts val="0"/>
+              </a:spcBef>
+              <a:spcAft>
+                <a:spcPts val="0"/>
+              </a:spcAft>
+              <a:buNone/>
+            </a:pPr>
+            <a:endParaRPr lang="en-US" dirty="0"/>
+          </a:p>
+          <a:p>
+            <a:pPr marL="0" lvl="0" indent="0" algn="l" rtl="0">
+              <a:spcBef>
+                <a:spcPts val="0"/>
+              </a:spcBef>
+              <a:spcAft>
+                <a:spcPts val="0"/>
+              </a:spcAft>
+              <a:buNone/>
+            </a:pPr>
+            <a:endParaRPr lang="en-US" dirty="0"/>
           </a:p>
         </p:txBody>
       </p:sp>
@@ -3893,61 +3737,108 @@
               <a:buNone/>
             </a:pPr>
             <a:r>
-              <a:rPr lang="en-US"/>
-              <a:t>Three things today: </a:t>
-            </a:r>
-            <a:endParaRPr/>
-          </a:p>
-          <a:p>
-            <a:pPr marL="457200" lvl="0" indent="-298450" algn="l" rtl="0">
-              <a:spcBef>
-                <a:spcPts val="0"/>
-              </a:spcBef>
-              <a:spcAft>
-                <a:spcPts val="0"/>
-              </a:spcAft>
-              <a:buSzPts val="1100"/>
-              <a:buChar char="●"/>
-            </a:pPr>
-            <a:r>
-              <a:rPr lang="en-US"/>
-              <a:t>StackQL in five minutes</a:t>
-            </a:r>
-            <a:endParaRPr/>
-          </a:p>
-          <a:p>
-            <a:pPr marL="457200" lvl="0" indent="-298450" algn="l" rtl="0">
-              <a:spcBef>
-                <a:spcPts val="0"/>
-              </a:spcBef>
-              <a:spcAft>
-                <a:spcPts val="0"/>
-              </a:spcAft>
-              <a:buSzPts val="1100"/>
-              <a:buChar char="●"/>
-            </a:pPr>
-            <a:r>
-              <a:rPr lang="en-US"/>
-              <a:t>what changes when agents write to your estate</a:t>
-            </a:r>
-            <a:endParaRPr/>
-          </a:p>
-          <a:p>
-            <a:pPr marL="457200" lvl="0" indent="-298450" algn="l" rtl="0">
-              <a:spcBef>
-                <a:spcPts val="0"/>
-              </a:spcBef>
-              <a:spcAft>
-                <a:spcPts val="0"/>
-              </a:spcAft>
-              <a:buSzPts val="1100"/>
-              <a:buChar char="●"/>
-            </a:pPr>
-            <a:r>
-              <a:rPr lang="en-US"/>
-              <a:t>and how to embed the MCP server in a Golang binary</a:t>
-            </a:r>
-            <a:endParaRPr/>
+              <a:rPr lang="en-US" dirty="0"/>
+              <a:t>Four specific places the model breaks. </a:t>
+            </a:r>
+          </a:p>
+          <a:p>
+            <a:pPr marL="0" lvl="0" indent="0" algn="l" rtl="0">
+              <a:spcBef>
+                <a:spcPts val="0"/>
+              </a:spcBef>
+              <a:spcAft>
+                <a:spcPts val="0"/>
+              </a:spcAft>
+              <a:buNone/>
+            </a:pPr>
+            <a:endParaRPr lang="en-US" dirty="0"/>
+          </a:p>
+          <a:p>
+            <a:pPr marL="0" lvl="0" indent="0" algn="l" rtl="0">
+              <a:spcBef>
+                <a:spcPts val="0"/>
+              </a:spcBef>
+              <a:spcAft>
+                <a:spcPts val="0"/>
+              </a:spcAft>
+              <a:buNone/>
+            </a:pPr>
+            <a:r>
+              <a:rPr lang="en-US" dirty="0"/>
+              <a:t>Single-writer state. </a:t>
+            </a:r>
+          </a:p>
+          <a:p>
+            <a:pPr marL="0" lvl="0" indent="0" algn="l" rtl="0">
+              <a:spcBef>
+                <a:spcPts val="0"/>
+              </a:spcBef>
+              <a:spcAft>
+                <a:spcPts val="0"/>
+              </a:spcAft>
+              <a:buNone/>
+            </a:pPr>
+            <a:r>
+              <a:rPr lang="en-US" dirty="0"/>
+              <a:t>Plan and apply expecting a human. </a:t>
+            </a:r>
+          </a:p>
+          <a:p>
+            <a:pPr marL="0" lvl="0" indent="0" algn="l" rtl="0">
+              <a:spcBef>
+                <a:spcPts val="0"/>
+              </a:spcBef>
+              <a:spcAft>
+                <a:spcPts val="0"/>
+              </a:spcAft>
+              <a:buNone/>
+            </a:pPr>
+            <a:r>
+              <a:rPr lang="en-US" dirty="0"/>
+              <a:t>Opinionated abstractions. </a:t>
+            </a:r>
+          </a:p>
+          <a:p>
+            <a:pPr marL="0" lvl="0" indent="0" algn="l" rtl="0">
+              <a:spcBef>
+                <a:spcPts val="0"/>
+              </a:spcBef>
+              <a:spcAft>
+                <a:spcPts val="0"/>
+              </a:spcAft>
+              <a:buNone/>
+            </a:pPr>
+            <a:r>
+              <a:rPr lang="en-US" dirty="0"/>
+              <a:t>And the control plane / data plane split. </a:t>
+            </a:r>
+          </a:p>
+          <a:p>
+            <a:pPr marL="0" lvl="0" indent="0" algn="l" rtl="0">
+              <a:spcBef>
+                <a:spcPts val="0"/>
+              </a:spcBef>
+              <a:spcAft>
+                <a:spcPts val="0"/>
+              </a:spcAft>
+              <a:buNone/>
+            </a:pPr>
+            <a:endParaRPr lang="en-US" dirty="0"/>
+          </a:p>
+          <a:p>
+            <a:pPr marL="0" lvl="0" indent="0" algn="l" rtl="0">
+              <a:spcBef>
+                <a:spcPts val="0"/>
+              </a:spcBef>
+              <a:spcAft>
+                <a:spcPts val="0"/>
+              </a:spcAft>
+              <a:buNone/>
+            </a:pPr>
+            <a:r>
+              <a:rPr lang="en-US" dirty="0"/>
+              <a:t>Let me take each one briefly.</a:t>
+            </a:r>
           </a:p>
           <a:p>
             <a:pPr marL="0" lvl="0" indent="0" algn="l" rtl="0">
@@ -3964,7 +3855,7 @@
               <a:buFont typeface="Arial"/>
               <a:buNone/>
             </a:pPr>
-            <a:endParaRPr/>
+            <a:endParaRPr dirty="0"/>
           </a:p>
           <a:p>
             <a:pPr marL="0" lvl="0" indent="0" algn="l" rtl="0">
@@ -3976,7 +3867,7 @@
               </a:spcAft>
               <a:buNone/>
             </a:pPr>
-            <a:endParaRPr/>
+            <a:endParaRPr dirty="0"/>
           </a:p>
         </p:txBody>
       </p:sp>
@@ -4045,10 +3936,10 @@
               <a:buNone/>
             </a:pPr>
             <a:r>
-              <a:rPr lang="en-US"/>
+              <a:rPr lang="en-US" dirty="0"/>
               <a:t>The state file is a cache of what one tool did. </a:t>
             </a:r>
-            <a:endParaRPr/>
+            <a:endParaRPr dirty="0"/>
           </a:p>
           <a:p>
             <a:pPr marL="0" lvl="0" indent="0" algn="l" rtl="0">
@@ -4060,7 +3951,7 @@
               </a:spcAft>
               <a:buNone/>
             </a:pPr>
-            <a:endParaRPr/>
+            <a:endParaRPr dirty="0"/>
           </a:p>
           <a:p>
             <a:pPr marL="0" lvl="0" indent="0" algn="l" rtl="0">
@@ -4073,10 +3964,10 @@
               <a:buNone/>
             </a:pPr>
             <a:r>
-              <a:rPr lang="en-US"/>
+              <a:rPr lang="en-US" dirty="0"/>
               <a:t>It is intent, not reality. </a:t>
             </a:r>
-            <a:endParaRPr/>
+            <a:endParaRPr dirty="0"/>
           </a:p>
           <a:p>
             <a:pPr marL="0" lvl="0" indent="0" algn="l" rtl="0">
@@ -4088,7 +3979,7 @@
               </a:spcAft>
               <a:buNone/>
             </a:pPr>
-            <a:endParaRPr/>
+            <a:endParaRPr dirty="0"/>
           </a:p>
           <a:p>
             <a:pPr marL="0" lvl="0" indent="0" algn="l" rtl="0">
@@ -4101,10 +3992,10 @@
               <a:buNone/>
             </a:pPr>
             <a:r>
-              <a:rPr lang="en-US"/>
+              <a:rPr lang="en-US" dirty="0"/>
               <a:t>If a human, an agent, all touch the same resource, the state file is wrong within seconds. </a:t>
             </a:r>
-            <a:endParaRPr/>
+            <a:endParaRPr dirty="0"/>
           </a:p>
           <a:p>
             <a:pPr marL="0" lvl="0" indent="0" algn="l" rtl="0">
@@ -4116,7 +4007,7 @@
               </a:spcAft>
               <a:buNone/>
             </a:pPr>
-            <a:endParaRPr/>
+            <a:endParaRPr dirty="0"/>
           </a:p>
           <a:p>
             <a:pPr marL="0" lvl="0" indent="0" algn="l" rtl="0">
@@ -4129,10 +4020,10 @@
               <a:buNone/>
             </a:pPr>
             <a:r>
-              <a:rPr lang="en-US"/>
+              <a:rPr lang="en-US" dirty="0"/>
               <a:t>The fix is not better locking. </a:t>
             </a:r>
-            <a:endParaRPr/>
+            <a:endParaRPr dirty="0"/>
           </a:p>
           <a:p>
             <a:pPr marL="0" lvl="0" indent="0" algn="l" rtl="0">
@@ -4144,7 +4035,7 @@
               </a:spcAft>
               <a:buNone/>
             </a:pPr>
-            <a:endParaRPr/>
+            <a:endParaRPr dirty="0"/>
           </a:p>
           <a:p>
             <a:pPr marL="0" lvl="0" indent="0" algn="l" rtl="0">
@@ -4157,10 +4048,18 @@
               <a:buNone/>
             </a:pPr>
             <a:r>
-              <a:rPr lang="en-US"/>
-              <a:t>The fix is recognising the state file is not the source of truth - the cloud is.</a:t>
-            </a:r>
-            <a:endParaRPr/>
+              <a:rPr lang="en-US" dirty="0"/>
+              <a:t>The fix is </a:t>
+            </a:r>
+            <a:r>
+              <a:rPr lang="en-US" dirty="0" err="1"/>
+              <a:t>recognising</a:t>
+            </a:r>
+            <a:r>
+              <a:rPr lang="en-US" dirty="0"/>
+              <a:t> the state file is not the source of truth - the cloud is.</a:t>
+            </a:r>
+            <a:endParaRPr dirty="0"/>
           </a:p>
         </p:txBody>
       </p:sp>
